--- a/Project Presentation Template.pptx
+++ b/Project Presentation Template.pptx
@@ -7044,7 +7044,7 @@
                 <a:latin typeface="Times New Roman" panose="02020603050405020304" pitchFamily="18" charset="0"/>
                 <a:cs typeface="Times New Roman" panose="02020603050405020304" pitchFamily="18" charset="0"/>
               </a:rPr>
-              <a:t>Publication / Patent </a:t>
+              <a:t>Publication</a:t>
             </a:r>
             <a:endParaRPr lang="en-IN" dirty="0">
               <a:latin typeface="Times New Roman" panose="02020603050405020304" pitchFamily="18" charset="0"/>
@@ -7053,31 +7053,44 @@
           </a:p>
         </p:txBody>
       </p:sp>
-      <p:sp>
-        <p:nvSpPr>
-          <p:cNvPr id="3" name="Content Placeholder 2">
-            <a:extLst>
-              <a:ext uri="{FF2B5EF4-FFF2-40B4-BE49-F238E27FC236}">
-                <a16:creationId xmlns:a16="http://schemas.microsoft.com/office/drawing/2014/main" id="{11C29A03-0D33-B23F-AA3C-AF4B3D8C82FA}"/>
-              </a:ext>
-            </a:extLst>
-          </p:cNvPr>
-          <p:cNvSpPr>
-            <a:spLocks noGrp="1"/>
-          </p:cNvSpPr>
+      <p:pic>
+        <p:nvPicPr>
+          <p:cNvPr id="9" name="Content Placeholder 8">
+            <a:extLst>
+              <a:ext uri="{FF2B5EF4-FFF2-40B4-BE49-F238E27FC236}">
+                <a16:creationId xmlns:a16="http://schemas.microsoft.com/office/drawing/2014/main" id="{B3CCCE00-2114-00BC-CFC6-8825B136FC0D}"/>
+              </a:ext>
+            </a:extLst>
+          </p:cNvPr>
+          <p:cNvPicPr>
+            <a:picLocks noGrp="1" noChangeAspect="1"/>
+          </p:cNvPicPr>
           <p:nvPr>
             <p:ph idx="1"/>
           </p:nvPr>
-        </p:nvSpPr>
-        <p:spPr/>
-        <p:txBody>
-          <a:bodyPr/>
-          <a:lstStyle/>
-          <a:p>
-            <a:endParaRPr lang="en-IN" dirty="0"/>
-          </a:p>
-        </p:txBody>
-      </p:sp>
+        </p:nvPicPr>
+        <p:blipFill>
+          <a:blip r:embed="rId2">
+            <a:extLst>
+              <a:ext uri="{28A0092B-C50C-407E-A947-70E740481C1C}">
+                <a14:useLocalDpi xmlns:a14="http://schemas.microsoft.com/office/drawing/2010/main" val="0"/>
+              </a:ext>
+            </a:extLst>
+          </a:blip>
+          <a:stretch>
+            <a:fillRect/>
+          </a:stretch>
+        </p:blipFill>
+        <p:spPr>
+          <a:xfrm>
+            <a:off x="1530420" y="1331640"/>
+            <a:ext cx="3862746" cy="5024710"/>
+          </a:xfrm>
+          <a:prstGeom prst="rect">
+            <a:avLst/>
+          </a:prstGeom>
+        </p:spPr>
+      </p:pic>
       <p:sp>
         <p:nvSpPr>
           <p:cNvPr id="4" name="Date Placeholder 3">
@@ -7136,6 +7149,42 @@
           </a:p>
         </p:txBody>
       </p:sp>
+      <p:pic>
+        <p:nvPicPr>
+          <p:cNvPr id="11" name="Picture 10">
+            <a:extLst>
+              <a:ext uri="{FF2B5EF4-FFF2-40B4-BE49-F238E27FC236}">
+                <a16:creationId xmlns:a16="http://schemas.microsoft.com/office/drawing/2014/main" id="{1E8266DE-6BCC-9EDB-8076-8BAF2D301C2E}"/>
+              </a:ext>
+            </a:extLst>
+          </p:cNvPr>
+          <p:cNvPicPr>
+            <a:picLocks noChangeAspect="1"/>
+          </p:cNvPicPr>
+          <p:nvPr/>
+        </p:nvPicPr>
+        <p:blipFill>
+          <a:blip r:embed="rId3">
+            <a:extLst>
+              <a:ext uri="{28A0092B-C50C-407E-A947-70E740481C1C}">
+                <a14:useLocalDpi xmlns:a14="http://schemas.microsoft.com/office/drawing/2010/main" val="0"/>
+              </a:ext>
+            </a:extLst>
+          </a:blip>
+          <a:stretch>
+            <a:fillRect/>
+          </a:stretch>
+        </p:blipFill>
+        <p:spPr>
+          <a:xfrm>
+            <a:off x="6798834" y="1195837"/>
+            <a:ext cx="3623532" cy="5048753"/>
+          </a:xfrm>
+          <a:prstGeom prst="rect">
+            <a:avLst/>
+          </a:prstGeom>
+        </p:spPr>
+      </p:pic>
     </p:spTree>
     <p:extLst>
       <p:ext uri="{BB962C8B-B14F-4D97-AF65-F5344CB8AC3E}">
